--- a/M1 Course/ENG/Билл Гейтс.pptx
+++ b/M1 Course/ENG/Билл Гейтс.pptx
@@ -275,7 +275,7 @@
           <a:p>
             <a:fld id="{1D8BD707-D9CF-40AE-B4C6-C98DA3205C09}" type="datetimeFigureOut">
               <a:rPr lang="en-US"/>
-              <a:t>1/20/2026</a:t>
+              <a:t>6/16/2026</a:t>
             </a:fld>
             <a:endParaRPr lang="en-US"/>
           </a:p>
@@ -1589,7 +1589,7 @@
           <a:p>
             <a:fld id="{1D8BD707-D9CF-40AE-B4C6-C98DA3205C09}" type="datetimeFigureOut">
               <a:rPr lang="en-US"/>
-              <a:t>1/20/2026</a:t>
+              <a:t>6/16/2026</a:t>
             </a:fld>
             <a:endParaRPr lang="en-US"/>
           </a:p>
@@ -1809,7 +1809,7 @@
           <a:p>
             <a:fld id="{1D8BD707-D9CF-40AE-B4C6-C98DA3205C09}" type="datetimeFigureOut">
               <a:rPr lang="en-US"/>
-              <a:t>1/20/2026</a:t>
+              <a:t>6/16/2026</a:t>
             </a:fld>
             <a:endParaRPr lang="en-US"/>
           </a:p>
@@ -1963,7 +1963,7 @@
           <a:p>
             <a:fld id="{1D8BD707-D9CF-40AE-B4C6-C98DA3205C09}" type="datetimeFigureOut">
               <a:rPr lang="en-US"/>
-              <a:t>1/20/2026</a:t>
+              <a:t>6/16/2026</a:t>
             </a:fld>
             <a:endParaRPr lang="en-US"/>
           </a:p>
@@ -2088,7 +2088,7 @@
           <a:p>
             <a:fld id="{1D8BD707-D9CF-40AE-B4C6-C98DA3205C09}" type="datetimeFigureOut">
               <a:rPr lang="en-US"/>
-              <a:t>1/20/2026</a:t>
+              <a:t>6/16/2026</a:t>
             </a:fld>
             <a:endParaRPr lang="en-US"/>
           </a:p>
@@ -2198,7 +2198,7 @@
           <a:p>
             <a:fld id="{273C401B-1B14-4810-BA37-2D3B4ECEFE53}" type="datetime1">
               <a:rPr lang="ru-RU" smtClean="0"/>
-              <a:t>20.01.2026</a:t>
+              <a:t>16.06.2026</a:t>
             </a:fld>
             <a:endParaRPr lang="ru-RU" dirty="0"/>
           </a:p>
@@ -3579,7 +3579,7 @@
           <a:p>
             <a:fld id="{1D8BD707-D9CF-40AE-B4C6-C98DA3205C09}" type="datetimeFigureOut">
               <a:rPr lang="en-US"/>
-              <a:t>1/20/2026</a:t>
+              <a:t>6/16/2026</a:t>
             </a:fld>
             <a:endParaRPr lang="en-US"/>
           </a:p>
@@ -4368,82 +4368,6 @@
       </p:sp>
       <p:sp>
         <p:nvSpPr>
-          <p:cNvPr id="7" name="TextBox 6">
-            <a:extLst>
-              <a:ext uri="{FF2B5EF4-FFF2-40B4-BE49-F238E27FC236}">
-                <a16:creationId xmlns:a16="http://schemas.microsoft.com/office/drawing/2014/main" id="{6C3462BF-EE51-1C7A-B837-25A97004CED5}"/>
-              </a:ext>
-            </a:extLst>
-          </p:cNvPr>
-          <p:cNvSpPr txBox="1"/>
-          <p:nvPr/>
-        </p:nvSpPr>
-        <p:spPr>
-          <a:xfrm>
-            <a:off x="3810000" y="6300860"/>
-            <a:ext cx="3503103" cy="310341"/>
-          </a:xfrm>
-          <a:prstGeom prst="rect">
-            <a:avLst/>
-          </a:prstGeom>
-          <a:noFill/>
-        </p:spPr>
-        <p:txBody>
-          <a:bodyPr wrap="square">
-            <a:spAutoFit/>
-          </a:bodyPr>
-          <a:lstStyle/>
-          <a:p>
-            <a:pPr marL="1957705" marR="5080" algn="ctr">
-              <a:lnSpc>
-                <a:spcPts val="1730"/>
-              </a:lnSpc>
-              <a:spcBef>
-                <a:spcPts val="120"/>
-              </a:spcBef>
-            </a:pPr>
-            <a:r>
-              <a:rPr lang="en-US" b="1" spc="-60" dirty="0">
-                <a:solidFill>
-                  <a:schemeClr val="bg1"/>
-                </a:solidFill>
-                <a:latin typeface="Times New Roman" panose="02020603050405020304" pitchFamily="18" charset="0"/>
-                <a:cs typeface="Times New Roman" panose="02020603050405020304" pitchFamily="18" charset="0"/>
-              </a:rPr>
-              <a:t>Tomsk</a:t>
-            </a:r>
-            <a:r>
-              <a:rPr lang="ru-RU" sz="1800" b="1" spc="-25" dirty="0">
-                <a:solidFill>
-                  <a:schemeClr val="bg1"/>
-                </a:solidFill>
-                <a:latin typeface="Times New Roman" panose="02020603050405020304" pitchFamily="18" charset="0"/>
-                <a:cs typeface="Times New Roman" panose="02020603050405020304" pitchFamily="18" charset="0"/>
-              </a:rPr>
-              <a:t> </a:t>
-            </a:r>
-            <a:r>
-              <a:rPr lang="ru-RU" sz="1800" b="1" spc="-5" dirty="0">
-                <a:solidFill>
-                  <a:schemeClr val="bg1"/>
-                </a:solidFill>
-                <a:latin typeface="Times New Roman" panose="02020603050405020304" pitchFamily="18" charset="0"/>
-                <a:cs typeface="Times New Roman" panose="02020603050405020304" pitchFamily="18" charset="0"/>
-              </a:rPr>
-              <a:t>2026</a:t>
-            </a:r>
-            <a:endParaRPr lang="ru-RU" sz="1800" b="1" dirty="0">
-              <a:solidFill>
-                <a:schemeClr val="bg1"/>
-              </a:solidFill>
-              <a:latin typeface="Times New Roman" panose="02020603050405020304" pitchFamily="18" charset="0"/>
-              <a:cs typeface="Times New Roman" panose="02020603050405020304" pitchFamily="18" charset="0"/>
-            </a:endParaRPr>
-          </a:p>
-        </p:txBody>
-      </p:sp>
-      <p:sp>
-        <p:nvSpPr>
           <p:cNvPr id="5" name="Прямоугольник 4">
             <a:extLst>
               <a:ext uri="{FF2B5EF4-FFF2-40B4-BE49-F238E27FC236}">
@@ -4456,7 +4380,7 @@
         </p:nvSpPr>
         <p:spPr>
           <a:xfrm>
-            <a:off x="5105400" y="533400"/>
+            <a:off x="5867400" y="462467"/>
             <a:ext cx="6096000" cy="1740220"/>
           </a:xfrm>
           <a:prstGeom prst="rect">
@@ -4548,6 +4472,54 @@
               </a:rPr>
               <a:t>TOMSK STATE UNIVERSITY OF CONTROL SYSTEMS AND RADIOELECTRONICS (TUSUR)</a:t>
             </a:r>
+          </a:p>
+        </p:txBody>
+      </p:sp>
+      <p:sp>
+        <p:nvSpPr>
+          <p:cNvPr id="3" name="TextBox 2">
+            <a:extLst>
+              <a:ext uri="{FF2B5EF4-FFF2-40B4-BE49-F238E27FC236}">
+                <a16:creationId xmlns:a16="http://schemas.microsoft.com/office/drawing/2014/main" id="{0BC938CA-D564-44ED-ABF6-4311AB7383C6}"/>
+              </a:ext>
+            </a:extLst>
+          </p:cNvPr>
+          <p:cNvSpPr txBox="1"/>
+          <p:nvPr/>
+        </p:nvSpPr>
+        <p:spPr>
+          <a:xfrm>
+            <a:off x="5069745" y="6226256"/>
+            <a:ext cx="1595309" cy="338554"/>
+          </a:xfrm>
+          <a:prstGeom prst="rect">
+            <a:avLst/>
+          </a:prstGeom>
+          <a:noFill/>
+        </p:spPr>
+        <p:txBody>
+          <a:bodyPr wrap="none" rtlCol="0">
+            <a:spAutoFit/>
+          </a:bodyPr>
+          <a:lstStyle/>
+          <a:p>
+            <a:r>
+              <a:rPr lang="en-US" sz="1600" b="1" dirty="0">
+                <a:solidFill>
+                  <a:prstClr val="white"/>
+                </a:solidFill>
+                <a:latin typeface="Verdana" panose="020B0604030504040204" pitchFamily="34" charset="0"/>
+                <a:ea typeface="Verdana" panose="020B0604030504040204" pitchFamily="34" charset="0"/>
+              </a:rPr>
+              <a:t>Tomsk 2026</a:t>
+            </a:r>
+            <a:endParaRPr lang="ru-RU" sz="1600" b="1" dirty="0">
+              <a:solidFill>
+                <a:prstClr val="white"/>
+              </a:solidFill>
+              <a:latin typeface="Verdana" panose="020B0604030504040204" pitchFamily="34" charset="0"/>
+              <a:ea typeface="Verdana" panose="020B0604030504040204" pitchFamily="34" charset="0"/>
+            </a:endParaRPr>
           </a:p>
         </p:txBody>
       </p:sp>
